--- a/mss_ai_ppt_sample_assets/backend/data/templates/mss_executive_v2.pptx
+++ b/mss_ai_ppt_sample_assets/backend/data/templates/mss_executive_v2.pptx
@@ -1,21 +1,24 @@
 
 <file path=ppt/presentation.xml><?xml version="1.0" encoding="utf-8"?>
-<p:presentation xmlns:a="http://schemas.openxmlformats.org/drawingml/2006/main" xmlns:r="http://schemas.openxmlformats.org/officeDocument/2006/relationships" xmlns:p="http://schemas.openxmlformats.org/presentationml/2006/main" saveSubsetFonts="1" autoCompressPictures="0">
+<p:presentation xmlns:a="http://schemas.openxmlformats.org/drawingml/2006/main" xmlns:r="http://schemas.openxmlformats.org/officeDocument/2006/relationships" xmlns:p="http://schemas.openxmlformats.org/presentationml/2006/main" autoCompressPictures="0">
   <p:sldMasterIdLst>
     <p:sldMasterId id="2147483648" r:id="rId1"/>
   </p:sldMasterIdLst>
   <p:sldIdLst>
-    <p:sldId id="256" r:id="rId7"/>
-    <p:sldId id="257" r:id="rId8"/>
-    <p:sldId id="258" r:id="rId9"/>
-    <p:sldId id="259" r:id="rId10"/>
-    <p:sldId id="260" r:id="rId11"/>
-    <p:sldId id="261" r:id="rId12"/>
-    <p:sldId id="262" r:id="rId13"/>
-    <p:sldId id="263" r:id="rId14"/>
+    <p:sldId id="256" r:id="rId3"/>
+    <p:sldId id="257" r:id="rId4"/>
+    <p:sldId id="258" r:id="rId5"/>
+    <p:sldId id="259" r:id="rId6"/>
+    <p:sldId id="260" r:id="rId7"/>
+    <p:sldId id="261" r:id="rId8"/>
+    <p:sldId id="262" r:id="rId9"/>
+    <p:sldId id="263" r:id="rId10"/>
   </p:sldIdLst>
-  <p:sldSz cx="12191695" cy="6858000" type="screen4x3"/>
+  <p:sldSz cx="12191365" cy="6858000" type="screen4x3"/>
   <p:notesSz cx="6858000" cy="9144000"/>
+  <p:custDataLst>
+    <p:tags r:id="rId14"/>
+  </p:custDataLst>
   <p:defaultTextStyle>
     <a:defPPr>
       <a:defRPr lang="en-US"/>
@@ -111,6 +114,22 @@
       </a:defRPr>
     </a:lvl9pPr>
   </p:defaultTextStyle>
+  <p:extLst>
+    <p:ext uri="{EFAFB233-063F-42B5-8137-9DF3F51BA10A}">
+      <p15:sldGuideLst xmlns:p15="http://schemas.microsoft.com/office/powerpoint/2012/main">
+        <p15:guide id="1" orient="horz" pos="2188" userDrawn="1">
+          <p15:clr>
+            <a:srgbClr val="A4A3A4"/>
+          </p15:clr>
+        </p15:guide>
+        <p15:guide id="2" pos="2880" userDrawn="1">
+          <p15:clr>
+            <a:srgbClr val="A4A3A4"/>
+          </p15:clr>
+        </p15:guide>
+      </p15:sldGuideLst>
+    </p:ext>
+  </p:extLst>
 </p:presentation>
 </file>
 
@@ -295,7 +314,6 @@
           <a:p>
             <a:fld id="{5BCAD085-E8A6-8845-BD4E-CB4CCA059FC4}" type="datetimeFigureOut">
               <a:rPr lang="en-US" smtClean="0"/>
-              <a:t>1/27/13</a:t>
             </a:fld>
             <a:endParaRPr lang="en-US"/>
           </a:p>
@@ -337,18 +355,12 @@
           <a:p>
             <a:fld id="{C1FF6DA9-008F-8B48-92A6-B652298478BF}" type="slidenum">
               <a:rPr lang="en-US" smtClean="0"/>
-              <a:t>‹#›</a:t>
             </a:fld>
             <a:endParaRPr lang="en-US"/>
           </a:p>
         </p:txBody>
       </p:sp>
     </p:spTree>
-    <p:extLst>
-      <p:ext uri="{BB962C8B-B14F-4D97-AF65-F5344CB8AC3E}">
-        <p14:creationId xmlns:p14="http://schemas.microsoft.com/office/powerpoint/2010/main" val="3168075583"/>
-      </p:ext>
-    </p:extLst>
   </p:cSld>
   <p:clrMapOvr>
     <a:masterClrMapping/>
@@ -416,6 +428,7 @@
               <a:rPr lang="en-US" smtClean="0"/>
               <a:t>Click to edit Master text styles</a:t>
             </a:r>
+            <a:endParaRPr lang="en-US" smtClean="0"/>
           </a:p>
           <a:p>
             <a:pPr lvl="1"/>
@@ -423,6 +436,7 @@
               <a:rPr lang="en-US" smtClean="0"/>
               <a:t>Second level</a:t>
             </a:r>
+            <a:endParaRPr lang="en-US" smtClean="0"/>
           </a:p>
           <a:p>
             <a:pPr lvl="2"/>
@@ -430,6 +444,7 @@
               <a:rPr lang="en-US" smtClean="0"/>
               <a:t>Third level</a:t>
             </a:r>
+            <a:endParaRPr lang="en-US" smtClean="0"/>
           </a:p>
           <a:p>
             <a:pPr lvl="3"/>
@@ -437,6 +452,7 @@
               <a:rPr lang="en-US" smtClean="0"/>
               <a:t>Fourth level</a:t>
             </a:r>
+            <a:endParaRPr lang="en-US" smtClean="0"/>
           </a:p>
           <a:p>
             <a:pPr lvl="4"/>
@@ -465,7 +481,6 @@
           <a:p>
             <a:fld id="{5BCAD085-E8A6-8845-BD4E-CB4CCA059FC4}" type="datetimeFigureOut">
               <a:rPr lang="en-US" smtClean="0"/>
-              <a:t>1/27/13</a:t>
             </a:fld>
             <a:endParaRPr lang="en-US"/>
           </a:p>
@@ -507,18 +522,12 @@
           <a:p>
             <a:fld id="{C1FF6DA9-008F-8B48-92A6-B652298478BF}" type="slidenum">
               <a:rPr lang="en-US" smtClean="0"/>
-              <a:t>‹#›</a:t>
             </a:fld>
             <a:endParaRPr lang="en-US"/>
           </a:p>
         </p:txBody>
       </p:sp>
     </p:spTree>
-    <p:extLst>
-      <p:ext uri="{BB962C8B-B14F-4D97-AF65-F5344CB8AC3E}">
-        <p14:creationId xmlns:p14="http://schemas.microsoft.com/office/powerpoint/2010/main" val="2910927964"/>
-      </p:ext>
-    </p:extLst>
   </p:cSld>
   <p:clrMapOvr>
     <a:masterClrMapping/>
@@ -596,6 +605,7 @@
               <a:rPr lang="en-US" smtClean="0"/>
               <a:t>Click to edit Master text styles</a:t>
             </a:r>
+            <a:endParaRPr lang="en-US" smtClean="0"/>
           </a:p>
           <a:p>
             <a:pPr lvl="1"/>
@@ -603,6 +613,7 @@
               <a:rPr lang="en-US" smtClean="0"/>
               <a:t>Second level</a:t>
             </a:r>
+            <a:endParaRPr lang="en-US" smtClean="0"/>
           </a:p>
           <a:p>
             <a:pPr lvl="2"/>
@@ -610,6 +621,7 @@
               <a:rPr lang="en-US" smtClean="0"/>
               <a:t>Third level</a:t>
             </a:r>
+            <a:endParaRPr lang="en-US" smtClean="0"/>
           </a:p>
           <a:p>
             <a:pPr lvl="3"/>
@@ -617,6 +629,7 @@
               <a:rPr lang="en-US" smtClean="0"/>
               <a:t>Fourth level</a:t>
             </a:r>
+            <a:endParaRPr lang="en-US" smtClean="0"/>
           </a:p>
           <a:p>
             <a:pPr lvl="4"/>
@@ -645,7 +658,6 @@
           <a:p>
             <a:fld id="{5BCAD085-E8A6-8845-BD4E-CB4CCA059FC4}" type="datetimeFigureOut">
               <a:rPr lang="en-US" smtClean="0"/>
-              <a:t>1/27/13</a:t>
             </a:fld>
             <a:endParaRPr lang="en-US"/>
           </a:p>
@@ -687,18 +699,12 @@
           <a:p>
             <a:fld id="{C1FF6DA9-008F-8B48-92A6-B652298478BF}" type="slidenum">
               <a:rPr lang="en-US" smtClean="0"/>
-              <a:t>‹#›</a:t>
             </a:fld>
             <a:endParaRPr lang="en-US"/>
           </a:p>
         </p:txBody>
       </p:sp>
     </p:spTree>
-    <p:extLst>
-      <p:ext uri="{BB962C8B-B14F-4D97-AF65-F5344CB8AC3E}">
-        <p14:creationId xmlns:p14="http://schemas.microsoft.com/office/powerpoint/2010/main" val="3612223792"/>
-      </p:ext>
-    </p:extLst>
   </p:cSld>
   <p:clrMapOvr>
     <a:masterClrMapping/>
@@ -766,6 +772,7 @@
               <a:rPr lang="en-US" smtClean="0"/>
               <a:t>Click to edit Master text styles</a:t>
             </a:r>
+            <a:endParaRPr lang="en-US" smtClean="0"/>
           </a:p>
           <a:p>
             <a:pPr lvl="1"/>
@@ -773,6 +780,7 @@
               <a:rPr lang="en-US" smtClean="0"/>
               <a:t>Second level</a:t>
             </a:r>
+            <a:endParaRPr lang="en-US" smtClean="0"/>
           </a:p>
           <a:p>
             <a:pPr lvl="2"/>
@@ -780,6 +788,7 @@
               <a:rPr lang="en-US" smtClean="0"/>
               <a:t>Third level</a:t>
             </a:r>
+            <a:endParaRPr lang="en-US" smtClean="0"/>
           </a:p>
           <a:p>
             <a:pPr lvl="3"/>
@@ -787,6 +796,7 @@
               <a:rPr lang="en-US" smtClean="0"/>
               <a:t>Fourth level</a:t>
             </a:r>
+            <a:endParaRPr lang="en-US" smtClean="0"/>
           </a:p>
           <a:p>
             <a:pPr lvl="4"/>
@@ -815,7 +825,6 @@
           <a:p>
             <a:fld id="{5BCAD085-E8A6-8845-BD4E-CB4CCA059FC4}" type="datetimeFigureOut">
               <a:rPr lang="en-US" smtClean="0"/>
-              <a:t>1/27/13</a:t>
             </a:fld>
             <a:endParaRPr lang="en-US"/>
           </a:p>
@@ -857,18 +866,12 @@
           <a:p>
             <a:fld id="{C1FF6DA9-008F-8B48-92A6-B652298478BF}" type="slidenum">
               <a:rPr lang="en-US" smtClean="0"/>
-              <a:t>‹#›</a:t>
             </a:fld>
             <a:endParaRPr lang="en-US"/>
           </a:p>
         </p:txBody>
       </p:sp>
     </p:spTree>
-    <p:extLst>
-      <p:ext uri="{BB962C8B-B14F-4D97-AF65-F5344CB8AC3E}">
-        <p14:creationId xmlns:p14="http://schemas.microsoft.com/office/powerpoint/2010/main" val="2614314258"/>
-      </p:ext>
-    </p:extLst>
   </p:cSld>
   <p:clrMapOvr>
     <a:masterClrMapping/>
@@ -1041,6 +1044,7 @@
               <a:rPr lang="en-US" smtClean="0"/>
               <a:t>Click to edit Master text styles</a:t>
             </a:r>
+            <a:endParaRPr lang="en-US" smtClean="0"/>
           </a:p>
         </p:txBody>
       </p:sp>
@@ -1061,7 +1065,6 @@
           <a:p>
             <a:fld id="{5BCAD085-E8A6-8845-BD4E-CB4CCA059FC4}" type="datetimeFigureOut">
               <a:rPr lang="en-US" smtClean="0"/>
-              <a:t>1/27/13</a:t>
             </a:fld>
             <a:endParaRPr lang="en-US"/>
           </a:p>
@@ -1103,18 +1106,12 @@
           <a:p>
             <a:fld id="{C1FF6DA9-008F-8B48-92A6-B652298478BF}" type="slidenum">
               <a:rPr lang="en-US" smtClean="0"/>
-              <a:t>‹#›</a:t>
             </a:fld>
             <a:endParaRPr lang="en-US"/>
           </a:p>
         </p:txBody>
       </p:sp>
     </p:spTree>
-    <p:extLst>
-      <p:ext uri="{BB962C8B-B14F-4D97-AF65-F5344CB8AC3E}">
-        <p14:creationId xmlns:p14="http://schemas.microsoft.com/office/powerpoint/2010/main" val="960648375"/>
-      </p:ext>
-    </p:extLst>
   </p:cSld>
   <p:clrMapOvr>
     <a:masterClrMapping/>
@@ -1215,6 +1212,7 @@
               <a:rPr lang="en-US" smtClean="0"/>
               <a:t>Click to edit Master text styles</a:t>
             </a:r>
+            <a:endParaRPr lang="en-US" smtClean="0"/>
           </a:p>
           <a:p>
             <a:pPr lvl="1"/>
@@ -1222,6 +1220,7 @@
               <a:rPr lang="en-US" smtClean="0"/>
               <a:t>Second level</a:t>
             </a:r>
+            <a:endParaRPr lang="en-US" smtClean="0"/>
           </a:p>
           <a:p>
             <a:pPr lvl="2"/>
@@ -1229,6 +1228,7 @@
               <a:rPr lang="en-US" smtClean="0"/>
               <a:t>Third level</a:t>
             </a:r>
+            <a:endParaRPr lang="en-US" smtClean="0"/>
           </a:p>
           <a:p>
             <a:pPr lvl="3"/>
@@ -1236,6 +1236,7 @@
               <a:rPr lang="en-US" smtClean="0"/>
               <a:t>Fourth level</a:t>
             </a:r>
+            <a:endParaRPr lang="en-US" smtClean="0"/>
           </a:p>
           <a:p>
             <a:pPr lvl="4"/>
@@ -1300,6 +1301,7 @@
               <a:rPr lang="en-US" smtClean="0"/>
               <a:t>Click to edit Master text styles</a:t>
             </a:r>
+            <a:endParaRPr lang="en-US" smtClean="0"/>
           </a:p>
           <a:p>
             <a:pPr lvl="1"/>
@@ -1307,6 +1309,7 @@
               <a:rPr lang="en-US" smtClean="0"/>
               <a:t>Second level</a:t>
             </a:r>
+            <a:endParaRPr lang="en-US" smtClean="0"/>
           </a:p>
           <a:p>
             <a:pPr lvl="2"/>
@@ -1314,6 +1317,7 @@
               <a:rPr lang="en-US" smtClean="0"/>
               <a:t>Third level</a:t>
             </a:r>
+            <a:endParaRPr lang="en-US" smtClean="0"/>
           </a:p>
           <a:p>
             <a:pPr lvl="3"/>
@@ -1321,6 +1325,7 @@
               <a:rPr lang="en-US" smtClean="0"/>
               <a:t>Fourth level</a:t>
             </a:r>
+            <a:endParaRPr lang="en-US" smtClean="0"/>
           </a:p>
           <a:p>
             <a:pPr lvl="4"/>
@@ -1349,7 +1354,6 @@
           <a:p>
             <a:fld id="{5BCAD085-E8A6-8845-BD4E-CB4CCA059FC4}" type="datetimeFigureOut">
               <a:rPr lang="en-US" smtClean="0"/>
-              <a:t>1/27/13</a:t>
             </a:fld>
             <a:endParaRPr lang="en-US"/>
           </a:p>
@@ -1391,18 +1395,12 @@
           <a:p>
             <a:fld id="{C1FF6DA9-008F-8B48-92A6-B652298478BF}" type="slidenum">
               <a:rPr lang="en-US" smtClean="0"/>
-              <a:t>‹#›</a:t>
             </a:fld>
             <a:endParaRPr lang="en-US"/>
           </a:p>
         </p:txBody>
       </p:sp>
     </p:spTree>
-    <p:extLst>
-      <p:ext uri="{BB962C8B-B14F-4D97-AF65-F5344CB8AC3E}">
-        <p14:creationId xmlns:p14="http://schemas.microsoft.com/office/powerpoint/2010/main" val="2782244947"/>
-      </p:ext>
-    </p:extLst>
   </p:cSld>
   <p:clrMapOvr>
     <a:masterClrMapping/>
@@ -1516,6 +1514,7 @@
               <a:rPr lang="en-US" smtClean="0"/>
               <a:t>Click to edit Master text styles</a:t>
             </a:r>
+            <a:endParaRPr lang="en-US" smtClean="0"/>
           </a:p>
         </p:txBody>
       </p:sp>
@@ -1572,6 +1571,7 @@
               <a:rPr lang="en-US" smtClean="0"/>
               <a:t>Click to edit Master text styles</a:t>
             </a:r>
+            <a:endParaRPr lang="en-US" smtClean="0"/>
           </a:p>
           <a:p>
             <a:pPr lvl="1"/>
@@ -1579,6 +1579,7 @@
               <a:rPr lang="en-US" smtClean="0"/>
               <a:t>Second level</a:t>
             </a:r>
+            <a:endParaRPr lang="en-US" smtClean="0"/>
           </a:p>
           <a:p>
             <a:pPr lvl="2"/>
@@ -1586,6 +1587,7 @@
               <a:rPr lang="en-US" smtClean="0"/>
               <a:t>Third level</a:t>
             </a:r>
+            <a:endParaRPr lang="en-US" smtClean="0"/>
           </a:p>
           <a:p>
             <a:pPr lvl="3"/>
@@ -1593,6 +1595,7 @@
               <a:rPr lang="en-US" smtClean="0"/>
               <a:t>Fourth level</a:t>
             </a:r>
+            <a:endParaRPr lang="en-US" smtClean="0"/>
           </a:p>
           <a:p>
             <a:pPr lvl="4"/>
@@ -1666,6 +1669,7 @@
               <a:rPr lang="en-US" smtClean="0"/>
               <a:t>Click to edit Master text styles</a:t>
             </a:r>
+            <a:endParaRPr lang="en-US" smtClean="0"/>
           </a:p>
         </p:txBody>
       </p:sp>
@@ -1722,6 +1726,7 @@
               <a:rPr lang="en-US" smtClean="0"/>
               <a:t>Click to edit Master text styles</a:t>
             </a:r>
+            <a:endParaRPr lang="en-US" smtClean="0"/>
           </a:p>
           <a:p>
             <a:pPr lvl="1"/>
@@ -1729,6 +1734,7 @@
               <a:rPr lang="en-US" smtClean="0"/>
               <a:t>Second level</a:t>
             </a:r>
+            <a:endParaRPr lang="en-US" smtClean="0"/>
           </a:p>
           <a:p>
             <a:pPr lvl="2"/>
@@ -1736,6 +1742,7 @@
               <a:rPr lang="en-US" smtClean="0"/>
               <a:t>Third level</a:t>
             </a:r>
+            <a:endParaRPr lang="en-US" smtClean="0"/>
           </a:p>
           <a:p>
             <a:pPr lvl="3"/>
@@ -1743,6 +1750,7 @@
               <a:rPr lang="en-US" smtClean="0"/>
               <a:t>Fourth level</a:t>
             </a:r>
+            <a:endParaRPr lang="en-US" smtClean="0"/>
           </a:p>
           <a:p>
             <a:pPr lvl="4"/>
@@ -1771,7 +1779,6 @@
           <a:p>
             <a:fld id="{5BCAD085-E8A6-8845-BD4E-CB4CCA059FC4}" type="datetimeFigureOut">
               <a:rPr lang="en-US" smtClean="0"/>
-              <a:t>1/27/13</a:t>
             </a:fld>
             <a:endParaRPr lang="en-US"/>
           </a:p>
@@ -1813,18 +1820,12 @@
           <a:p>
             <a:fld id="{C1FF6DA9-008F-8B48-92A6-B652298478BF}" type="slidenum">
               <a:rPr lang="en-US" smtClean="0"/>
-              <a:t>‹#›</a:t>
             </a:fld>
             <a:endParaRPr lang="en-US"/>
           </a:p>
         </p:txBody>
       </p:sp>
     </p:spTree>
-    <p:extLst>
-      <p:ext uri="{BB962C8B-B14F-4D97-AF65-F5344CB8AC3E}">
-        <p14:creationId xmlns:p14="http://schemas.microsoft.com/office/powerpoint/2010/main" val="990158736"/>
-      </p:ext>
-    </p:extLst>
   </p:cSld>
   <p:clrMapOvr>
     <a:masterClrMapping/>
@@ -1889,7 +1890,6 @@
           <a:p>
             <a:fld id="{5BCAD085-E8A6-8845-BD4E-CB4CCA059FC4}" type="datetimeFigureOut">
               <a:rPr lang="en-US" smtClean="0"/>
-              <a:t>1/27/13</a:t>
             </a:fld>
             <a:endParaRPr lang="en-US"/>
           </a:p>
@@ -1931,18 +1931,12 @@
           <a:p>
             <a:fld id="{C1FF6DA9-008F-8B48-92A6-B652298478BF}" type="slidenum">
               <a:rPr lang="en-US" smtClean="0"/>
-              <a:t>‹#›</a:t>
             </a:fld>
             <a:endParaRPr lang="en-US"/>
           </a:p>
         </p:txBody>
       </p:sp>
     </p:spTree>
-    <p:extLst>
-      <p:ext uri="{BB962C8B-B14F-4D97-AF65-F5344CB8AC3E}">
-        <p14:creationId xmlns:p14="http://schemas.microsoft.com/office/powerpoint/2010/main" val="727027711"/>
-      </p:ext>
-    </p:extLst>
   </p:cSld>
   <p:clrMapOvr>
     <a:masterClrMapping/>
@@ -1984,7 +1978,6 @@
           <a:p>
             <a:fld id="{5BCAD085-E8A6-8845-BD4E-CB4CCA059FC4}" type="datetimeFigureOut">
               <a:rPr lang="en-US" smtClean="0"/>
-              <a:t>1/27/13</a:t>
             </a:fld>
             <a:endParaRPr lang="en-US"/>
           </a:p>
@@ -2026,18 +2019,12 @@
           <a:p>
             <a:fld id="{C1FF6DA9-008F-8B48-92A6-B652298478BF}" type="slidenum">
               <a:rPr lang="en-US" smtClean="0"/>
-              <a:t>‹#›</a:t>
             </a:fld>
             <a:endParaRPr lang="en-US"/>
           </a:p>
         </p:txBody>
       </p:sp>
     </p:spTree>
-    <p:extLst>
-      <p:ext uri="{BB962C8B-B14F-4D97-AF65-F5344CB8AC3E}">
-        <p14:creationId xmlns:p14="http://schemas.microsoft.com/office/powerpoint/2010/main" val="1212999818"/>
-      </p:ext>
-    </p:extLst>
   </p:cSld>
   <p:clrMapOvr>
     <a:masterClrMapping/>
@@ -2147,6 +2134,7 @@
               <a:rPr lang="en-US" smtClean="0"/>
               <a:t>Click to edit Master text styles</a:t>
             </a:r>
+            <a:endParaRPr lang="en-US" smtClean="0"/>
           </a:p>
           <a:p>
             <a:pPr lvl="1"/>
@@ -2154,6 +2142,7 @@
               <a:rPr lang="en-US" smtClean="0"/>
               <a:t>Second level</a:t>
             </a:r>
+            <a:endParaRPr lang="en-US" smtClean="0"/>
           </a:p>
           <a:p>
             <a:pPr lvl="2"/>
@@ -2161,6 +2150,7 @@
               <a:rPr lang="en-US" smtClean="0"/>
               <a:t>Third level</a:t>
             </a:r>
+            <a:endParaRPr lang="en-US" smtClean="0"/>
           </a:p>
           <a:p>
             <a:pPr lvl="3"/>
@@ -2168,6 +2158,7 @@
               <a:rPr lang="en-US" smtClean="0"/>
               <a:t>Fourth level</a:t>
             </a:r>
+            <a:endParaRPr lang="en-US" smtClean="0"/>
           </a:p>
           <a:p>
             <a:pPr lvl="4"/>
@@ -2241,6 +2232,7 @@
               <a:rPr lang="en-US" smtClean="0"/>
               <a:t>Click to edit Master text styles</a:t>
             </a:r>
+            <a:endParaRPr lang="en-US" smtClean="0"/>
           </a:p>
         </p:txBody>
       </p:sp>
@@ -2261,7 +2253,6 @@
           <a:p>
             <a:fld id="{5BCAD085-E8A6-8845-BD4E-CB4CCA059FC4}" type="datetimeFigureOut">
               <a:rPr lang="en-US" smtClean="0"/>
-              <a:t>1/27/13</a:t>
             </a:fld>
             <a:endParaRPr lang="en-US"/>
           </a:p>
@@ -2303,18 +2294,12 @@
           <a:p>
             <a:fld id="{C1FF6DA9-008F-8B48-92A6-B652298478BF}" type="slidenum">
               <a:rPr lang="en-US" smtClean="0"/>
-              <a:t>‹#›</a:t>
             </a:fld>
             <a:endParaRPr lang="en-US"/>
           </a:p>
         </p:txBody>
       </p:sp>
     </p:spTree>
-    <p:extLst>
-      <p:ext uri="{BB962C8B-B14F-4D97-AF65-F5344CB8AC3E}">
-        <p14:creationId xmlns:p14="http://schemas.microsoft.com/office/powerpoint/2010/main" val="1840726560"/>
-      </p:ext>
-    </p:extLst>
   </p:cSld>
   <p:clrMapOvr>
     <a:masterClrMapping/>
@@ -2494,6 +2479,7 @@
               <a:rPr lang="en-US" smtClean="0"/>
               <a:t>Click to edit Master text styles</a:t>
             </a:r>
+            <a:endParaRPr lang="en-US" smtClean="0"/>
           </a:p>
         </p:txBody>
       </p:sp>
@@ -2514,7 +2500,6 @@
           <a:p>
             <a:fld id="{5BCAD085-E8A6-8845-BD4E-CB4CCA059FC4}" type="datetimeFigureOut">
               <a:rPr lang="en-US" smtClean="0"/>
-              <a:t>1/27/13</a:t>
             </a:fld>
             <a:endParaRPr lang="en-US"/>
           </a:p>
@@ -2556,18 +2541,12 @@
           <a:p>
             <a:fld id="{C1FF6DA9-008F-8B48-92A6-B652298478BF}" type="slidenum">
               <a:rPr lang="en-US" smtClean="0"/>
-              <a:t>‹#›</a:t>
             </a:fld>
             <a:endParaRPr lang="en-US"/>
           </a:p>
         </p:txBody>
       </p:sp>
     </p:spTree>
-    <p:extLst>
-      <p:ext uri="{BB962C8B-B14F-4D97-AF65-F5344CB8AC3E}">
-        <p14:creationId xmlns:p14="http://schemas.microsoft.com/office/powerpoint/2010/main" val="3889236939"/>
-      </p:ext>
-    </p:extLst>
   </p:cSld>
   <p:clrMapOvr>
     <a:masterClrMapping/>
@@ -2660,6 +2639,7 @@
               <a:rPr lang="en-US" smtClean="0"/>
               <a:t>Click to edit Master text styles</a:t>
             </a:r>
+            <a:endParaRPr lang="en-US" smtClean="0"/>
           </a:p>
           <a:p>
             <a:pPr lvl="1"/>
@@ -2667,6 +2647,7 @@
               <a:rPr lang="en-US" smtClean="0"/>
               <a:t>Second level</a:t>
             </a:r>
+            <a:endParaRPr lang="en-US" smtClean="0"/>
           </a:p>
           <a:p>
             <a:pPr lvl="2"/>
@@ -2674,6 +2655,7 @@
               <a:rPr lang="en-US" smtClean="0"/>
               <a:t>Third level</a:t>
             </a:r>
+            <a:endParaRPr lang="en-US" smtClean="0"/>
           </a:p>
           <a:p>
             <a:pPr lvl="3"/>
@@ -2681,6 +2663,7 @@
               <a:rPr lang="en-US" smtClean="0"/>
               <a:t>Fourth level</a:t>
             </a:r>
+            <a:endParaRPr lang="en-US" smtClean="0"/>
           </a:p>
           <a:p>
             <a:pPr lvl="4"/>
@@ -2727,7 +2710,6 @@
           <a:p>
             <a:fld id="{5BCAD085-E8A6-8845-BD4E-CB4CCA059FC4}" type="datetimeFigureOut">
               <a:rPr lang="en-US" smtClean="0"/>
-              <a:t>1/27/13</a:t>
             </a:fld>
             <a:endParaRPr lang="en-US"/>
           </a:p>
@@ -2805,18 +2787,12 @@
           <a:p>
             <a:fld id="{C1FF6DA9-008F-8B48-92A6-B652298478BF}" type="slidenum">
               <a:rPr lang="en-US" smtClean="0"/>
-              <a:t>‹#›</a:t>
             </a:fld>
             <a:endParaRPr lang="en-US"/>
           </a:p>
         </p:txBody>
       </p:sp>
     </p:spTree>
-    <p:extLst>
-      <p:ext uri="{BB962C8B-B14F-4D97-AF65-F5344CB8AC3E}">
-        <p14:creationId xmlns:p14="http://schemas.microsoft.com/office/powerpoint/2010/main" val="2209977519"/>
-      </p:ext>
-    </p:extLst>
   </p:cSld>
   <p:clrMap bg1="lt1" tx1="dk1" bg2="lt2" tx2="dk2" accent1="accent1" accent2="accent2" accent3="accent3" accent4="accent4" accent5="accent5" accent6="accent6" hlink="hlink" folHlink="folHlink"/>
   <p:sldLayoutIdLst>
@@ -2854,7 +2830,7 @@
         <a:spcBef>
           <a:spcPct val="20000"/>
         </a:spcBef>
-        <a:buFont typeface="Arial"/>
+        <a:buFont typeface="Arial" panose="020B0604020202020204"/>
         <a:buChar char="•"/>
         <a:defRPr sz="3200" kern="1200">
           <a:solidFill>
@@ -2869,7 +2845,7 @@
         <a:spcBef>
           <a:spcPct val="20000"/>
         </a:spcBef>
-        <a:buFont typeface="Arial"/>
+        <a:buFont typeface="Arial" panose="020B0604020202020204"/>
         <a:buChar char="–"/>
         <a:defRPr sz="2800" kern="1200">
           <a:solidFill>
@@ -2884,7 +2860,7 @@
         <a:spcBef>
           <a:spcPct val="20000"/>
         </a:spcBef>
-        <a:buFont typeface="Arial"/>
+        <a:buFont typeface="Arial" panose="020B0604020202020204"/>
         <a:buChar char="•"/>
         <a:defRPr sz="2400" kern="1200">
           <a:solidFill>
@@ -2899,7 +2875,7 @@
         <a:spcBef>
           <a:spcPct val="20000"/>
         </a:spcBef>
-        <a:buFont typeface="Arial"/>
+        <a:buFont typeface="Arial" panose="020B0604020202020204"/>
         <a:buChar char="–"/>
         <a:defRPr sz="2000" kern="1200">
           <a:solidFill>
@@ -2914,7 +2890,7 @@
         <a:spcBef>
           <a:spcPct val="20000"/>
         </a:spcBef>
-        <a:buFont typeface="Arial"/>
+        <a:buFont typeface="Arial" panose="020B0604020202020204"/>
         <a:buChar char="»"/>
         <a:defRPr sz="2000" kern="1200">
           <a:solidFill>
@@ -2929,7 +2905,7 @@
         <a:spcBef>
           <a:spcPct val="20000"/>
         </a:spcBef>
-        <a:buFont typeface="Arial"/>
+        <a:buFont typeface="Arial" panose="020B0604020202020204"/>
         <a:buChar char="•"/>
         <a:defRPr sz="2000" kern="1200">
           <a:solidFill>
@@ -2944,7 +2920,7 @@
         <a:spcBef>
           <a:spcPct val="20000"/>
         </a:spcBef>
-        <a:buFont typeface="Arial"/>
+        <a:buFont typeface="Arial" panose="020B0604020202020204"/>
         <a:buChar char="•"/>
         <a:defRPr sz="2000" kern="1200">
           <a:solidFill>
@@ -2959,7 +2935,7 @@
         <a:spcBef>
           <a:spcPct val="20000"/>
         </a:spcBef>
-        <a:buFont typeface="Arial"/>
+        <a:buFont typeface="Arial" panose="020B0604020202020204"/>
         <a:buChar char="•"/>
         <a:defRPr sz="2000" kern="1200">
           <a:solidFill>
@@ -2974,7 +2950,7 @@
         <a:spcBef>
           <a:spcPct val="20000"/>
         </a:spcBef>
-        <a:buFont typeface="Arial"/>
+        <a:buFont typeface="Arial" panose="020B0604020202020204"/>
         <a:buChar char="•"/>
         <a:defRPr sz="2000" kern="1200">
           <a:solidFill>
@@ -3086,7 +3062,7 @@
 </file>
 
 <file path=ppt/slides/slide1.xml><?xml version="1.0" encoding="utf-8"?>
-<p:sld xmlns:a="http://schemas.openxmlformats.org/drawingml/2006/main" xmlns:p="http://schemas.openxmlformats.org/presentationml/2006/main" xmlns:r="http://schemas.openxmlformats.org/officeDocument/2006/relationships">
+<p:sld xmlns:a="http://schemas.openxmlformats.org/drawingml/2006/main" xmlns:r="http://schemas.openxmlformats.org/officeDocument/2006/relationships" xmlns:p="http://schemas.openxmlformats.org/presentationml/2006/main">
   <p:cSld>
     <p:bg>
       <p:bgPr>
@@ -3163,7 +3139,7 @@
           <a:noFill/>
         </p:spPr>
         <p:txBody>
-          <a:bodyPr wrap="square" lIns="101600" rIns="101600" tIns="50800" bIns="50800">
+          <a:bodyPr wrap="square" lIns="101600" tIns="50800" rIns="101600" bIns="50800">
             <a:spAutoFit/>
           </a:bodyPr>
           <a:lstStyle/>
@@ -3173,7 +3149,7 @@
                 <a:solidFill>
                   <a:srgbClr val="0A4275"/>
                 </a:solidFill>
-                <a:latin typeface="Microsoft YaHei"/>
+                <a:latin typeface="微软雅黑" panose="020B0503020204020204" charset="-122"/>
               </a:defRPr>
             </a:pPr>
             <a:r>
@@ -3242,7 +3218,7 @@
           <a:noFill/>
         </p:spPr>
         <p:txBody>
-          <a:bodyPr wrap="square" lIns="101600" rIns="101600" tIns="50800" bIns="50800">
+          <a:bodyPr wrap="square" lIns="101600" tIns="50800" rIns="101600" bIns="50800">
             <a:spAutoFit/>
           </a:bodyPr>
           <a:lstStyle/>
@@ -3252,7 +3228,7 @@
                 <a:solidFill>
                   <a:srgbClr val="333333"/>
                 </a:solidFill>
-                <a:latin typeface="Microsoft YaHei"/>
+                <a:latin typeface="微软雅黑" panose="020B0503020204020204" charset="-122"/>
               </a:defRPr>
             </a:pPr>
             <a:r>
@@ -3278,7 +3254,7 @@
           <a:noFill/>
         </p:spPr>
         <p:txBody>
-          <a:bodyPr wrap="square" lIns="101600" rIns="101600" tIns="50800" bIns="50800">
+          <a:bodyPr wrap="square" lIns="101600" tIns="50800" rIns="101600" bIns="50800">
             <a:spAutoFit/>
           </a:bodyPr>
           <a:lstStyle/>
@@ -3288,7 +3264,7 @@
                 <a:solidFill>
                   <a:srgbClr val="555555"/>
                 </a:solidFill>
-                <a:latin typeface="Microsoft YaHei"/>
+                <a:latin typeface="微软雅黑" panose="020B0503020204020204" charset="-122"/>
               </a:defRPr>
             </a:pPr>
             <a:r>
@@ -3306,7 +3282,7 @@
         <p:spPr>
           <a:xfrm>
             <a:off x="731520" y="5852160"/>
-            <a:ext cx="5029200" cy="320040"/>
+            <a:ext cx="5029200" cy="316865"/>
           </a:xfrm>
           <a:prstGeom prst="rect">
             <a:avLst/>
@@ -3314,7 +3290,7 @@
           <a:noFill/>
         </p:spPr>
         <p:txBody>
-          <a:bodyPr wrap="square" lIns="101600" rIns="101600" tIns="50800" bIns="50800">
+          <a:bodyPr wrap="square" lIns="101600" tIns="50800" rIns="101600" bIns="50800">
             <a:spAutoFit/>
           </a:bodyPr>
           <a:lstStyle/>
@@ -3324,11 +3300,11 @@
                 <a:solidFill>
                   <a:srgbClr val="666666"/>
                 </a:solidFill>
-                <a:latin typeface="Microsoft YaHei"/>
+                <a:latin typeface="微软雅黑" panose="020B0503020204020204" charset="-122"/>
               </a:defRPr>
             </a:pPr>
             <a:r>
-              <a:t>{{CONFIDENTIALITY_LABEL}}</a:t>
+              <a:t>密级：内部</a:t>
             </a:r>
           </a:p>
         </p:txBody>
@@ -3350,7 +3326,7 @@
           <a:noFill/>
         </p:spPr>
         <p:txBody>
-          <a:bodyPr wrap="square" lIns="101600" rIns="101600" tIns="50800" bIns="50800">
+          <a:bodyPr wrap="square" lIns="101600" tIns="50800" rIns="101600" bIns="50800">
             <a:spAutoFit/>
           </a:bodyPr>
           <a:lstStyle/>
@@ -3360,7 +3336,7 @@
                 <a:solidFill>
                   <a:srgbClr val="666666"/>
                 </a:solidFill>
-                <a:latin typeface="Microsoft YaHei"/>
+                <a:latin typeface="微软雅黑" panose="020B0503020204020204" charset="-122"/>
               </a:defRPr>
             </a:pPr>
             <a:r>
@@ -3378,7 +3354,7 @@
 </file>
 
 <file path=ppt/slides/slide2.xml><?xml version="1.0" encoding="utf-8"?>
-<p:sld xmlns:a="http://schemas.openxmlformats.org/drawingml/2006/main" xmlns:p="http://schemas.openxmlformats.org/presentationml/2006/main" xmlns:r="http://schemas.openxmlformats.org/officeDocument/2006/relationships">
+<p:sld xmlns:a="http://schemas.openxmlformats.org/drawingml/2006/main" xmlns:r="http://schemas.openxmlformats.org/officeDocument/2006/relationships" xmlns:p="http://schemas.openxmlformats.org/presentationml/2006/main">
   <p:cSld>
     <p:bg>
       <p:bgPr>
@@ -3498,7 +3474,7 @@
           <a:noFill/>
         </p:spPr>
         <p:txBody>
-          <a:bodyPr wrap="square" lIns="101600" rIns="101600" tIns="50800" bIns="50800">
+          <a:bodyPr wrap="square" lIns="101600" tIns="50800" rIns="101600" bIns="50800">
             <a:spAutoFit/>
           </a:bodyPr>
           <a:lstStyle/>
@@ -3508,7 +3484,7 @@
                 <a:solidFill>
                   <a:srgbClr val="0A4275"/>
                 </a:solidFill>
-                <a:latin typeface="Microsoft YaHei"/>
+                <a:latin typeface="微软雅黑" panose="020B0503020204020204" charset="-122"/>
               </a:defRPr>
             </a:pPr>
             <a:r>
@@ -3579,7 +3555,7 @@
           <a:noFill/>
         </p:spPr>
         <p:txBody>
-          <a:bodyPr wrap="square" lIns="101600" rIns="101600" tIns="50800" bIns="50800">
+          <a:bodyPr wrap="square" lIns="101600" tIns="50800" rIns="101600" bIns="50800">
             <a:spAutoFit/>
           </a:bodyPr>
           <a:lstStyle/>
@@ -3589,7 +3565,7 @@
                 <a:solidFill>
                   <a:srgbClr val="0A4275"/>
                 </a:solidFill>
-                <a:latin typeface="Microsoft YaHei"/>
+                <a:latin typeface="微软雅黑" panose="020B0503020204020204" charset="-122"/>
               </a:defRPr>
             </a:pPr>
             <a:r>
@@ -3660,7 +3636,7 @@
           <a:noFill/>
         </p:spPr>
         <p:txBody>
-          <a:bodyPr wrap="square" lIns="101600" rIns="101600" tIns="50800" bIns="50800">
+          <a:bodyPr wrap="square" lIns="101600" tIns="50800" rIns="101600" bIns="50800">
             <a:spAutoFit/>
           </a:bodyPr>
           <a:lstStyle/>
@@ -3670,7 +3646,7 @@
                 <a:solidFill>
                   <a:srgbClr val="333333"/>
                 </a:solidFill>
-                <a:latin typeface="Microsoft YaHei"/>
+                <a:latin typeface="微软雅黑" panose="020B0503020204020204" charset="-122"/>
               </a:defRPr>
             </a:pPr>
             <a:r>
@@ -3741,7 +3717,7 @@
           <a:noFill/>
         </p:spPr>
         <p:txBody>
-          <a:bodyPr wrap="square" lIns="101600" rIns="101600" tIns="50800" bIns="50800">
+          <a:bodyPr wrap="square" lIns="101600" tIns="50800" rIns="101600" bIns="50800">
             <a:spAutoFit/>
           </a:bodyPr>
           <a:lstStyle/>
@@ -3751,7 +3727,7 @@
                 <a:solidFill>
                   <a:srgbClr val="333333"/>
                 </a:solidFill>
-                <a:latin typeface="Microsoft YaHei"/>
+                <a:latin typeface="微软雅黑" panose="020B0503020204020204" charset="-122"/>
               </a:defRPr>
             </a:pPr>
             <a:r>
@@ -3865,7 +3841,7 @@
           <a:noFill/>
         </p:spPr>
         <p:txBody>
-          <a:bodyPr wrap="square" lIns="101600" rIns="101600" tIns="50800" bIns="50800">
+          <a:bodyPr wrap="square" lIns="101600" tIns="50800" rIns="101600" bIns="50800">
             <a:spAutoFit/>
           </a:bodyPr>
           <a:lstStyle/>
@@ -3875,7 +3851,7 @@
                 <a:solidFill>
                   <a:srgbClr val="0A4275"/>
                 </a:solidFill>
-                <a:latin typeface="Microsoft YaHei"/>
+                <a:latin typeface="微软雅黑" panose="020B0503020204020204" charset="-122"/>
               </a:defRPr>
             </a:pPr>
             <a:r>
@@ -3901,7 +3877,7 @@
           <a:noFill/>
         </p:spPr>
         <p:txBody>
-          <a:bodyPr wrap="square" lIns="101600" rIns="101600" tIns="50800" bIns="50800">
+          <a:bodyPr wrap="square" lIns="101600" tIns="50800" rIns="101600" bIns="50800">
             <a:spAutoFit/>
           </a:bodyPr>
           <a:lstStyle/>
@@ -3911,7 +3887,7 @@
                 <a:solidFill>
                   <a:srgbClr val="333333"/>
                 </a:solidFill>
-                <a:latin typeface="Microsoft YaHei"/>
+                <a:latin typeface="微软雅黑" panose="020B0503020204020204" charset="-122"/>
               </a:defRPr>
             </a:pPr>
             <a:r>
@@ -3929,7 +3905,7 @@
 </file>
 
 <file path=ppt/slides/slide3.xml><?xml version="1.0" encoding="utf-8"?>
-<p:sld xmlns:a="http://schemas.openxmlformats.org/drawingml/2006/main" xmlns:p="http://schemas.openxmlformats.org/presentationml/2006/main" xmlns:r="http://schemas.openxmlformats.org/officeDocument/2006/relationships">
+<p:sld xmlns:a="http://schemas.openxmlformats.org/drawingml/2006/main" xmlns:r="http://schemas.openxmlformats.org/officeDocument/2006/relationships" xmlns:p="http://schemas.openxmlformats.org/presentationml/2006/main">
   <p:cSld>
     <p:bg>
       <p:bgPr>
@@ -4049,7 +4025,7 @@
           <a:noFill/>
         </p:spPr>
         <p:txBody>
-          <a:bodyPr wrap="square" lIns="101600" rIns="101600" tIns="50800" bIns="50800">
+          <a:bodyPr wrap="square" lIns="101600" tIns="50800" rIns="101600" bIns="50800">
             <a:spAutoFit/>
           </a:bodyPr>
           <a:lstStyle/>
@@ -4059,7 +4035,7 @@
                 <a:solidFill>
                   <a:srgbClr val="0A4275"/>
                 </a:solidFill>
-                <a:latin typeface="Microsoft YaHei"/>
+                <a:latin typeface="微软雅黑" panose="020B0503020204020204" charset="-122"/>
               </a:defRPr>
             </a:pPr>
             <a:r>
@@ -4173,7 +4149,7 @@
           <a:noFill/>
         </p:spPr>
         <p:txBody>
-          <a:bodyPr wrap="square" lIns="101600" rIns="101600" tIns="50800" bIns="50800">
+          <a:bodyPr wrap="square" lIns="101600" tIns="50800" rIns="101600" bIns="50800">
             <a:spAutoFit/>
           </a:bodyPr>
           <a:lstStyle/>
@@ -4183,7 +4159,7 @@
                 <a:solidFill>
                   <a:srgbClr val="0A4275"/>
                 </a:solidFill>
-                <a:latin typeface="Microsoft YaHei"/>
+                <a:latin typeface="微软雅黑" panose="020B0503020204020204" charset="-122"/>
               </a:defRPr>
             </a:pPr>
             <a:r>
@@ -4209,7 +4185,7 @@
           <a:noFill/>
         </p:spPr>
         <p:txBody>
-          <a:bodyPr wrap="square" lIns="101600" rIns="101600" tIns="50800" bIns="50800">
+          <a:bodyPr wrap="square" lIns="101600" tIns="50800" rIns="101600" bIns="50800">
             <a:spAutoFit/>
           </a:bodyPr>
           <a:lstStyle/>
@@ -4219,7 +4195,7 @@
                 <a:solidFill>
                   <a:srgbClr val="333333"/>
                 </a:solidFill>
-                <a:latin typeface="Microsoft YaHei"/>
+                <a:latin typeface="微软雅黑" panose="020B0503020204020204" charset="-122"/>
               </a:defRPr>
             </a:pPr>
             <a:r>
@@ -4333,7 +4309,7 @@
           <a:noFill/>
         </p:spPr>
         <p:txBody>
-          <a:bodyPr wrap="square" lIns="101600" rIns="101600" tIns="50800" bIns="50800">
+          <a:bodyPr wrap="square" lIns="101600" tIns="50800" rIns="101600" bIns="50800">
             <a:spAutoFit/>
           </a:bodyPr>
           <a:lstStyle/>
@@ -4343,7 +4319,7 @@
                 <a:solidFill>
                   <a:srgbClr val="0A4275"/>
                 </a:solidFill>
-                <a:latin typeface="Microsoft YaHei"/>
+                <a:latin typeface="微软雅黑" panose="020B0503020204020204" charset="-122"/>
               </a:defRPr>
             </a:pPr>
             <a:r>
@@ -4369,7 +4345,7 @@
           <a:noFill/>
         </p:spPr>
         <p:txBody>
-          <a:bodyPr wrap="square" lIns="101600" rIns="101600" tIns="50800" bIns="50800">
+          <a:bodyPr wrap="square" lIns="101600" tIns="50800" rIns="101600" bIns="50800">
             <a:spAutoFit/>
           </a:bodyPr>
           <a:lstStyle/>
@@ -4379,7 +4355,7 @@
                 <a:solidFill>
                   <a:srgbClr val="333333"/>
                 </a:solidFill>
-                <a:latin typeface="Microsoft YaHei"/>
+                <a:latin typeface="微软雅黑" panose="020B0503020204020204" charset="-122"/>
               </a:defRPr>
             </a:pPr>
             <a:r>
@@ -4493,7 +4469,7 @@
           <a:noFill/>
         </p:spPr>
         <p:txBody>
-          <a:bodyPr wrap="square" lIns="101600" rIns="101600" tIns="50800" bIns="50800">
+          <a:bodyPr wrap="square" lIns="101600" tIns="50800" rIns="101600" bIns="50800">
             <a:spAutoFit/>
           </a:bodyPr>
           <a:lstStyle/>
@@ -4503,7 +4479,7 @@
                 <a:solidFill>
                   <a:srgbClr val="0A4275"/>
                 </a:solidFill>
-                <a:latin typeface="Microsoft YaHei"/>
+                <a:latin typeface="微软雅黑" panose="020B0503020204020204" charset="-122"/>
               </a:defRPr>
             </a:pPr>
             <a:r>
@@ -4529,7 +4505,7 @@
           <a:noFill/>
         </p:spPr>
         <p:txBody>
-          <a:bodyPr wrap="square" lIns="101600" rIns="101600" tIns="50800" bIns="50800">
+          <a:bodyPr wrap="square" lIns="101600" tIns="50800" rIns="101600" bIns="50800">
             <a:spAutoFit/>
           </a:bodyPr>
           <a:lstStyle/>
@@ -4539,7 +4515,7 @@
                 <a:solidFill>
                   <a:srgbClr val="333333"/>
                 </a:solidFill>
-                <a:latin typeface="Microsoft YaHei"/>
+                <a:latin typeface="微软雅黑" panose="020B0503020204020204" charset="-122"/>
               </a:defRPr>
             </a:pPr>
             <a:r>
@@ -4653,7 +4629,7 @@
           <a:noFill/>
         </p:spPr>
         <p:txBody>
-          <a:bodyPr wrap="square" lIns="101600" rIns="101600" tIns="50800" bIns="50800">
+          <a:bodyPr wrap="square" lIns="101600" tIns="50800" rIns="101600" bIns="50800">
             <a:spAutoFit/>
           </a:bodyPr>
           <a:lstStyle/>
@@ -4663,7 +4639,7 @@
                 <a:solidFill>
                   <a:srgbClr val="0A4275"/>
                 </a:solidFill>
-                <a:latin typeface="Microsoft YaHei"/>
+                <a:latin typeface="微软雅黑" panose="020B0503020204020204" charset="-122"/>
               </a:defRPr>
             </a:pPr>
             <a:r>
@@ -4689,7 +4665,7 @@
           <a:noFill/>
         </p:spPr>
         <p:txBody>
-          <a:bodyPr wrap="square" lIns="101600" rIns="101600" tIns="50800" bIns="50800">
+          <a:bodyPr wrap="square" lIns="101600" tIns="50800" rIns="101600" bIns="50800">
             <a:spAutoFit/>
           </a:bodyPr>
           <a:lstStyle/>
@@ -4699,7 +4675,7 @@
                 <a:solidFill>
                   <a:srgbClr val="333333"/>
                 </a:solidFill>
-                <a:latin typeface="Microsoft YaHei"/>
+                <a:latin typeface="微软雅黑" panose="020B0503020204020204" charset="-122"/>
               </a:defRPr>
             </a:pPr>
             <a:r>
@@ -4717,7 +4693,7 @@
 </file>
 
 <file path=ppt/slides/slide4.xml><?xml version="1.0" encoding="utf-8"?>
-<p:sld xmlns:a="http://schemas.openxmlformats.org/drawingml/2006/main" xmlns:p="http://schemas.openxmlformats.org/presentationml/2006/main" xmlns:r="http://schemas.openxmlformats.org/officeDocument/2006/relationships">
+<p:sld xmlns:a="http://schemas.openxmlformats.org/drawingml/2006/main" xmlns:r="http://schemas.openxmlformats.org/officeDocument/2006/relationships" xmlns:p="http://schemas.openxmlformats.org/presentationml/2006/main">
   <p:cSld>
     <p:bg>
       <p:bgPr>
@@ -4837,7 +4813,7 @@
           <a:noFill/>
         </p:spPr>
         <p:txBody>
-          <a:bodyPr wrap="square" lIns="101600" rIns="101600" tIns="50800" bIns="50800">
+          <a:bodyPr wrap="square" lIns="101600" tIns="50800" rIns="101600" bIns="50800">
             <a:spAutoFit/>
           </a:bodyPr>
           <a:lstStyle/>
@@ -4847,7 +4823,7 @@
                 <a:solidFill>
                   <a:srgbClr val="0A4275"/>
                 </a:solidFill>
-                <a:latin typeface="Microsoft YaHei"/>
+                <a:latin typeface="微软雅黑" panose="020B0503020204020204" charset="-122"/>
               </a:defRPr>
             </a:pPr>
             <a:r>
@@ -4961,7 +4937,7 @@
           <a:noFill/>
         </p:spPr>
         <p:txBody>
-          <a:bodyPr wrap="square" lIns="101600" rIns="101600" tIns="50800" bIns="50800">
+          <a:bodyPr wrap="square" lIns="101600" tIns="50800" rIns="101600" bIns="50800">
             <a:spAutoFit/>
           </a:bodyPr>
           <a:lstStyle/>
@@ -4971,7 +4947,7 @@
                 <a:solidFill>
                   <a:srgbClr val="0A4275"/>
                 </a:solidFill>
-                <a:latin typeface="Microsoft YaHei"/>
+                <a:latin typeface="微软雅黑" panose="020B0503020204020204" charset="-122"/>
               </a:defRPr>
             </a:pPr>
             <a:r>
@@ -4997,7 +4973,7 @@
           <a:noFill/>
         </p:spPr>
         <p:txBody>
-          <a:bodyPr wrap="square" lIns="101600" rIns="101600" tIns="50800" bIns="50800">
+          <a:bodyPr wrap="square" lIns="101600" tIns="50800" rIns="101600" bIns="50800">
             <a:spAutoFit/>
           </a:bodyPr>
           <a:lstStyle/>
@@ -5007,7 +4983,7 @@
                 <a:solidFill>
                   <a:srgbClr val="333333"/>
                 </a:solidFill>
-                <a:latin typeface="Microsoft YaHei"/>
+                <a:latin typeface="微软雅黑" panose="020B0503020204020204" charset="-122"/>
               </a:defRPr>
             </a:pPr>
             <a:r>
@@ -5121,7 +5097,7 @@
           <a:noFill/>
         </p:spPr>
         <p:txBody>
-          <a:bodyPr wrap="square" lIns="101600" rIns="101600" tIns="50800" bIns="50800">
+          <a:bodyPr wrap="square" lIns="101600" tIns="50800" rIns="101600" bIns="50800">
             <a:spAutoFit/>
           </a:bodyPr>
           <a:lstStyle/>
@@ -5131,7 +5107,7 @@
                 <a:solidFill>
                   <a:srgbClr val="0A4275"/>
                 </a:solidFill>
-                <a:latin typeface="Microsoft YaHei"/>
+                <a:latin typeface="微软雅黑" panose="020B0503020204020204" charset="-122"/>
               </a:defRPr>
             </a:pPr>
             <a:r>
@@ -5157,7 +5133,7 @@
           <a:noFill/>
         </p:spPr>
         <p:txBody>
-          <a:bodyPr wrap="square" lIns="101600" rIns="101600" tIns="50800" bIns="50800">
+          <a:bodyPr wrap="square" lIns="101600" tIns="50800" rIns="101600" bIns="50800">
             <a:spAutoFit/>
           </a:bodyPr>
           <a:lstStyle/>
@@ -5167,7 +5143,7 @@
                 <a:solidFill>
                   <a:srgbClr val="333333"/>
                 </a:solidFill>
-                <a:latin typeface="Microsoft YaHei"/>
+                <a:latin typeface="微软雅黑" panose="020B0503020204020204" charset="-122"/>
               </a:defRPr>
             </a:pPr>
             <a:r>
@@ -5281,7 +5257,7 @@
           <a:noFill/>
         </p:spPr>
         <p:txBody>
-          <a:bodyPr wrap="square" lIns="101600" rIns="101600" tIns="50800" bIns="50800">
+          <a:bodyPr wrap="square" lIns="101600" tIns="50800" rIns="101600" bIns="50800">
             <a:spAutoFit/>
           </a:bodyPr>
           <a:lstStyle/>
@@ -5291,7 +5267,7 @@
                 <a:solidFill>
                   <a:srgbClr val="0A4275"/>
                 </a:solidFill>
-                <a:latin typeface="Microsoft YaHei"/>
+                <a:latin typeface="微软雅黑" panose="020B0503020204020204" charset="-122"/>
               </a:defRPr>
             </a:pPr>
             <a:r>
@@ -5317,7 +5293,7 @@
           <a:noFill/>
         </p:spPr>
         <p:txBody>
-          <a:bodyPr wrap="square" lIns="101600" rIns="101600" tIns="50800" bIns="50800">
+          <a:bodyPr wrap="square" lIns="101600" tIns="50800" rIns="101600" bIns="50800">
             <a:spAutoFit/>
           </a:bodyPr>
           <a:lstStyle/>
@@ -5327,7 +5303,7 @@
                 <a:solidFill>
                   <a:srgbClr val="333333"/>
                 </a:solidFill>
-                <a:latin typeface="Microsoft YaHei"/>
+                <a:latin typeface="微软雅黑" panose="020B0503020204020204" charset="-122"/>
               </a:defRPr>
             </a:pPr>
             <a:r>
@@ -5345,7 +5321,7 @@
 </file>
 
 <file path=ppt/slides/slide5.xml><?xml version="1.0" encoding="utf-8"?>
-<p:sld xmlns:a="http://schemas.openxmlformats.org/drawingml/2006/main" xmlns:p="http://schemas.openxmlformats.org/presentationml/2006/main" xmlns:r="http://schemas.openxmlformats.org/officeDocument/2006/relationships">
+<p:sld xmlns:a="http://schemas.openxmlformats.org/drawingml/2006/main" xmlns:r="http://schemas.openxmlformats.org/officeDocument/2006/relationships" xmlns:p="http://schemas.openxmlformats.org/presentationml/2006/main">
   <p:cSld>
     <p:bg>
       <p:bgPr>
@@ -5465,7 +5441,7 @@
           <a:noFill/>
         </p:spPr>
         <p:txBody>
-          <a:bodyPr wrap="square" lIns="101600" rIns="101600" tIns="50800" bIns="50800">
+          <a:bodyPr wrap="square" lIns="101600" tIns="50800" rIns="101600" bIns="50800">
             <a:spAutoFit/>
           </a:bodyPr>
           <a:lstStyle/>
@@ -5475,7 +5451,7 @@
                 <a:solidFill>
                   <a:srgbClr val="0A4275"/>
                 </a:solidFill>
-                <a:latin typeface="Microsoft YaHei"/>
+                <a:latin typeface="微软雅黑" panose="020B0503020204020204" charset="-122"/>
               </a:defRPr>
             </a:pPr>
             <a:r>
@@ -5589,7 +5565,7 @@
           <a:noFill/>
         </p:spPr>
         <p:txBody>
-          <a:bodyPr wrap="square" lIns="101600" rIns="101600" tIns="50800" bIns="50800">
+          <a:bodyPr wrap="square" lIns="101600" tIns="50800" rIns="101600" bIns="50800">
             <a:spAutoFit/>
           </a:bodyPr>
           <a:lstStyle/>
@@ -5599,7 +5575,7 @@
                 <a:solidFill>
                   <a:srgbClr val="0A4275"/>
                 </a:solidFill>
-                <a:latin typeface="Microsoft YaHei"/>
+                <a:latin typeface="微软雅黑" panose="020B0503020204020204" charset="-122"/>
               </a:defRPr>
             </a:pPr>
             <a:r>
@@ -5625,7 +5601,7 @@
           <a:noFill/>
         </p:spPr>
         <p:txBody>
-          <a:bodyPr wrap="square" lIns="101600" rIns="101600" tIns="50800" bIns="50800">
+          <a:bodyPr wrap="square" lIns="101600" tIns="50800" rIns="101600" bIns="50800">
             <a:spAutoFit/>
           </a:bodyPr>
           <a:lstStyle/>
@@ -5635,7 +5611,7 @@
                 <a:solidFill>
                   <a:srgbClr val="333333"/>
                 </a:solidFill>
-                <a:latin typeface="Microsoft YaHei"/>
+                <a:latin typeface="微软雅黑" panose="020B0503020204020204" charset="-122"/>
               </a:defRPr>
             </a:pPr>
             <a:r>
@@ -5749,7 +5725,7 @@
           <a:noFill/>
         </p:spPr>
         <p:txBody>
-          <a:bodyPr wrap="square" lIns="101600" rIns="101600" tIns="50800" bIns="50800">
+          <a:bodyPr wrap="square" lIns="101600" tIns="50800" rIns="101600" bIns="50800">
             <a:spAutoFit/>
           </a:bodyPr>
           <a:lstStyle/>
@@ -5759,7 +5735,7 @@
                 <a:solidFill>
                   <a:srgbClr val="0A4275"/>
                 </a:solidFill>
-                <a:latin typeface="Microsoft YaHei"/>
+                <a:latin typeface="微软雅黑" panose="020B0503020204020204" charset="-122"/>
               </a:defRPr>
             </a:pPr>
             <a:r>
@@ -5785,7 +5761,7 @@
           <a:noFill/>
         </p:spPr>
         <p:txBody>
-          <a:bodyPr wrap="square" lIns="101600" rIns="101600" tIns="50800" bIns="50800">
+          <a:bodyPr wrap="square" lIns="101600" tIns="50800" rIns="101600" bIns="50800">
             <a:spAutoFit/>
           </a:bodyPr>
           <a:lstStyle/>
@@ -5795,7 +5771,7 @@
                 <a:solidFill>
                   <a:srgbClr val="333333"/>
                 </a:solidFill>
-                <a:latin typeface="Microsoft YaHei"/>
+                <a:latin typeface="微软雅黑" panose="020B0503020204020204" charset="-122"/>
               </a:defRPr>
             </a:pPr>
             <a:r>
@@ -5909,7 +5885,7 @@
           <a:noFill/>
         </p:spPr>
         <p:txBody>
-          <a:bodyPr wrap="square" lIns="101600" rIns="101600" tIns="50800" bIns="50800">
+          <a:bodyPr wrap="square" lIns="101600" tIns="50800" rIns="101600" bIns="50800">
             <a:spAutoFit/>
           </a:bodyPr>
           <a:lstStyle/>
@@ -5919,7 +5895,7 @@
                 <a:solidFill>
                   <a:srgbClr val="0A4275"/>
                 </a:solidFill>
-                <a:latin typeface="Microsoft YaHei"/>
+                <a:latin typeface="微软雅黑" panose="020B0503020204020204" charset="-122"/>
               </a:defRPr>
             </a:pPr>
             <a:r>
@@ -5945,7 +5921,7 @@
           <a:noFill/>
         </p:spPr>
         <p:txBody>
-          <a:bodyPr wrap="square" lIns="101600" rIns="101600" tIns="50800" bIns="50800">
+          <a:bodyPr wrap="square" lIns="101600" tIns="50800" rIns="101600" bIns="50800">
             <a:spAutoFit/>
           </a:bodyPr>
           <a:lstStyle/>
@@ -5955,7 +5931,7 @@
                 <a:solidFill>
                   <a:srgbClr val="333333"/>
                 </a:solidFill>
-                <a:latin typeface="Microsoft YaHei"/>
+                <a:latin typeface="微软雅黑" panose="020B0503020204020204" charset="-122"/>
               </a:defRPr>
             </a:pPr>
             <a:r>
@@ -6069,7 +6045,7 @@
           <a:noFill/>
         </p:spPr>
         <p:txBody>
-          <a:bodyPr wrap="square" lIns="101600" rIns="101600" tIns="50800" bIns="50800">
+          <a:bodyPr wrap="square" lIns="101600" tIns="50800" rIns="101600" bIns="50800">
             <a:spAutoFit/>
           </a:bodyPr>
           <a:lstStyle/>
@@ -6079,7 +6055,7 @@
                 <a:solidFill>
                   <a:srgbClr val="0A4275"/>
                 </a:solidFill>
-                <a:latin typeface="Microsoft YaHei"/>
+                <a:latin typeface="微软雅黑" panose="020B0503020204020204" charset="-122"/>
               </a:defRPr>
             </a:pPr>
             <a:r>
@@ -6105,7 +6081,7 @@
           <a:noFill/>
         </p:spPr>
         <p:txBody>
-          <a:bodyPr wrap="square" lIns="101600" rIns="101600" tIns="50800" bIns="50800">
+          <a:bodyPr wrap="square" lIns="101600" tIns="50800" rIns="101600" bIns="50800">
             <a:spAutoFit/>
           </a:bodyPr>
           <a:lstStyle/>
@@ -6115,7 +6091,7 @@
                 <a:solidFill>
                   <a:srgbClr val="333333"/>
                 </a:solidFill>
-                <a:latin typeface="Microsoft YaHei"/>
+                <a:latin typeface="微软雅黑" panose="020B0503020204020204" charset="-122"/>
               </a:defRPr>
             </a:pPr>
             <a:r>
@@ -6229,7 +6205,7 @@
           <a:noFill/>
         </p:spPr>
         <p:txBody>
-          <a:bodyPr wrap="square" lIns="101600" rIns="101600" tIns="50800" bIns="50800">
+          <a:bodyPr wrap="square" lIns="101600" tIns="50800" rIns="101600" bIns="50800">
             <a:spAutoFit/>
           </a:bodyPr>
           <a:lstStyle/>
@@ -6239,7 +6215,7 @@
                 <a:solidFill>
                   <a:srgbClr val="0A4275"/>
                 </a:solidFill>
-                <a:latin typeface="Microsoft YaHei"/>
+                <a:latin typeface="微软雅黑" panose="020B0503020204020204" charset="-122"/>
               </a:defRPr>
             </a:pPr>
             <a:r>
@@ -6265,7 +6241,7 @@
           <a:noFill/>
         </p:spPr>
         <p:txBody>
-          <a:bodyPr wrap="square" lIns="101600" rIns="101600" tIns="50800" bIns="50800">
+          <a:bodyPr wrap="square" lIns="101600" tIns="50800" rIns="101600" bIns="50800">
             <a:spAutoFit/>
           </a:bodyPr>
           <a:lstStyle/>
@@ -6275,7 +6251,7 @@
                 <a:solidFill>
                   <a:srgbClr val="333333"/>
                 </a:solidFill>
-                <a:latin typeface="Microsoft YaHei"/>
+                <a:latin typeface="微软雅黑" panose="020B0503020204020204" charset="-122"/>
               </a:defRPr>
             </a:pPr>
             <a:r>
@@ -6301,7 +6277,7 @@
           <a:noFill/>
         </p:spPr>
         <p:txBody>
-          <a:bodyPr wrap="square" lIns="101600" rIns="101600" tIns="50800" bIns="50800">
+          <a:bodyPr wrap="square" lIns="101600" tIns="50800" rIns="101600" bIns="50800">
             <a:spAutoFit/>
           </a:bodyPr>
           <a:lstStyle/>
@@ -6311,7 +6287,7 @@
                 <a:solidFill>
                   <a:srgbClr val="666666"/>
                 </a:solidFill>
-                <a:latin typeface="Microsoft YaHei"/>
+                <a:latin typeface="微软雅黑" panose="020B0503020204020204" charset="-122"/>
               </a:defRPr>
             </a:pPr>
             <a:r>
@@ -6329,7 +6305,7 @@
 </file>
 
 <file path=ppt/slides/slide6.xml><?xml version="1.0" encoding="utf-8"?>
-<p:sld xmlns:a="http://schemas.openxmlformats.org/drawingml/2006/main" xmlns:p="http://schemas.openxmlformats.org/presentationml/2006/main" xmlns:r="http://schemas.openxmlformats.org/officeDocument/2006/relationships">
+<p:sld xmlns:a="http://schemas.openxmlformats.org/drawingml/2006/main" xmlns:r="http://schemas.openxmlformats.org/officeDocument/2006/relationships" xmlns:p="http://schemas.openxmlformats.org/presentationml/2006/main">
   <p:cSld>
     <p:bg>
       <p:bgPr>
@@ -6449,7 +6425,7 @@
           <a:noFill/>
         </p:spPr>
         <p:txBody>
-          <a:bodyPr wrap="square" lIns="101600" rIns="101600" tIns="50800" bIns="50800">
+          <a:bodyPr wrap="square" lIns="101600" tIns="50800" rIns="101600" bIns="50800">
             <a:spAutoFit/>
           </a:bodyPr>
           <a:lstStyle/>
@@ -6459,7 +6435,7 @@
                 <a:solidFill>
                   <a:srgbClr val="0A4275"/>
                 </a:solidFill>
-                <a:latin typeface="Microsoft YaHei"/>
+                <a:latin typeface="微软雅黑" panose="020B0503020204020204" charset="-122"/>
               </a:defRPr>
             </a:pPr>
             <a:r>
@@ -6530,7 +6506,7 @@
           <a:noFill/>
         </p:spPr>
         <p:txBody>
-          <a:bodyPr wrap="square" lIns="101600" rIns="101600" tIns="50800" bIns="50800">
+          <a:bodyPr wrap="square" lIns="101600" tIns="50800" rIns="101600" bIns="50800">
             <a:spAutoFit/>
           </a:bodyPr>
           <a:lstStyle/>
@@ -6540,7 +6516,7 @@
                 <a:solidFill>
                   <a:srgbClr val="555555"/>
                 </a:solidFill>
-                <a:latin typeface="Microsoft YaHei"/>
+                <a:latin typeface="微软雅黑" panose="020B0503020204020204" charset="-122"/>
               </a:defRPr>
             </a:pPr>
             <a:r>
@@ -6566,7 +6542,7 @@
           <a:noFill/>
         </p:spPr>
         <p:txBody>
-          <a:bodyPr wrap="square" lIns="101600" rIns="101600" tIns="50800" bIns="50800">
+          <a:bodyPr wrap="square" lIns="101600" tIns="50800" rIns="101600" bIns="50800">
             <a:spAutoFit/>
           </a:bodyPr>
           <a:lstStyle/>
@@ -6576,7 +6552,7 @@
                 <a:solidFill>
                   <a:srgbClr val="0A4275"/>
                 </a:solidFill>
-                <a:latin typeface="Microsoft YaHei"/>
+                <a:latin typeface="微软雅黑" panose="020B0503020204020204" charset="-122"/>
               </a:defRPr>
             </a:pPr>
             <a:r>
@@ -6690,7 +6666,7 @@
           <a:noFill/>
         </p:spPr>
         <p:txBody>
-          <a:bodyPr wrap="square" lIns="101600" rIns="101600" tIns="50800" bIns="50800">
+          <a:bodyPr wrap="square" lIns="101600" tIns="50800" rIns="101600" bIns="50800">
             <a:spAutoFit/>
           </a:bodyPr>
           <a:lstStyle/>
@@ -6700,7 +6676,7 @@
                 <a:solidFill>
                   <a:srgbClr val="0A4275"/>
                 </a:solidFill>
-                <a:latin typeface="Microsoft YaHei"/>
+                <a:latin typeface="微软雅黑" panose="020B0503020204020204" charset="-122"/>
               </a:defRPr>
             </a:pPr>
             <a:r>
@@ -6726,7 +6702,7 @@
           <a:noFill/>
         </p:spPr>
         <p:txBody>
-          <a:bodyPr wrap="square" lIns="101600" rIns="101600" tIns="50800" bIns="50800">
+          <a:bodyPr wrap="square" lIns="101600" tIns="50800" rIns="101600" bIns="50800">
             <a:spAutoFit/>
           </a:bodyPr>
           <a:lstStyle/>
@@ -6736,7 +6712,7 @@
                 <a:solidFill>
                   <a:srgbClr val="333333"/>
                 </a:solidFill>
-                <a:latin typeface="Microsoft YaHei"/>
+                <a:latin typeface="微软雅黑" panose="020B0503020204020204" charset="-122"/>
               </a:defRPr>
             </a:pPr>
             <a:r>
@@ -6805,7 +6781,7 @@
           <a:noFill/>
         </p:spPr>
         <p:txBody>
-          <a:bodyPr wrap="square" lIns="101600" rIns="101600" tIns="50800" bIns="50800">
+          <a:bodyPr wrap="square" lIns="101600" tIns="50800" rIns="101600" bIns="50800">
             <a:spAutoFit/>
           </a:bodyPr>
           <a:lstStyle/>
@@ -6815,7 +6791,7 @@
                 <a:solidFill>
                   <a:srgbClr val="0A4275"/>
                 </a:solidFill>
-                <a:latin typeface="Microsoft YaHei"/>
+                <a:latin typeface="微软雅黑" panose="020B0503020204020204" charset="-122"/>
               </a:defRPr>
             </a:pPr>
             <a:r>
@@ -6841,7 +6817,7 @@
           <a:noFill/>
         </p:spPr>
         <p:txBody>
-          <a:bodyPr wrap="square" lIns="101600" rIns="101600" tIns="50800" bIns="50800">
+          <a:bodyPr wrap="square" lIns="101600" tIns="50800" rIns="101600" bIns="50800">
             <a:spAutoFit/>
           </a:bodyPr>
           <a:lstStyle/>
@@ -6851,7 +6827,7 @@
                 <a:solidFill>
                   <a:srgbClr val="333333"/>
                 </a:solidFill>
-                <a:latin typeface="Microsoft YaHei"/>
+                <a:latin typeface="微软雅黑" panose="020B0503020204020204" charset="-122"/>
               </a:defRPr>
             </a:pPr>
             <a:r>
@@ -6965,7 +6941,7 @@
           <a:noFill/>
         </p:spPr>
         <p:txBody>
-          <a:bodyPr wrap="square" lIns="101600" rIns="101600" tIns="50800" bIns="50800">
+          <a:bodyPr wrap="square" lIns="101600" tIns="50800" rIns="101600" bIns="50800">
             <a:spAutoFit/>
           </a:bodyPr>
           <a:lstStyle/>
@@ -6975,7 +6951,7 @@
                 <a:solidFill>
                   <a:srgbClr val="0A4275"/>
                 </a:solidFill>
-                <a:latin typeface="Microsoft YaHei"/>
+                <a:latin typeface="微软雅黑" panose="020B0503020204020204" charset="-122"/>
               </a:defRPr>
             </a:pPr>
             <a:r>
@@ -7001,7 +6977,7 @@
           <a:noFill/>
         </p:spPr>
         <p:txBody>
-          <a:bodyPr wrap="square" lIns="101600" rIns="101600" tIns="50800" bIns="50800">
+          <a:bodyPr wrap="square" lIns="101600" tIns="50800" rIns="101600" bIns="50800">
             <a:spAutoFit/>
           </a:bodyPr>
           <a:lstStyle/>
@@ -7011,7 +6987,7 @@
                 <a:solidFill>
                   <a:srgbClr val="333333"/>
                 </a:solidFill>
-                <a:latin typeface="Microsoft YaHei"/>
+                <a:latin typeface="微软雅黑" panose="020B0503020204020204" charset="-122"/>
               </a:defRPr>
             </a:pPr>
             <a:r>
@@ -7029,7 +7005,7 @@
 </file>
 
 <file path=ppt/slides/slide7.xml><?xml version="1.0" encoding="utf-8"?>
-<p:sld xmlns:a="http://schemas.openxmlformats.org/drawingml/2006/main" xmlns:p="http://schemas.openxmlformats.org/presentationml/2006/main" xmlns:r="http://schemas.openxmlformats.org/officeDocument/2006/relationships">
+<p:sld xmlns:a="http://schemas.openxmlformats.org/drawingml/2006/main" xmlns:r="http://schemas.openxmlformats.org/officeDocument/2006/relationships" xmlns:p="http://schemas.openxmlformats.org/presentationml/2006/main">
   <p:cSld>
     <p:bg>
       <p:bgPr>
@@ -7149,7 +7125,7 @@
           <a:noFill/>
         </p:spPr>
         <p:txBody>
-          <a:bodyPr wrap="square" lIns="101600" rIns="101600" tIns="50800" bIns="50800">
+          <a:bodyPr wrap="square" lIns="101600" tIns="50800" rIns="101600" bIns="50800">
             <a:spAutoFit/>
           </a:bodyPr>
           <a:lstStyle/>
@@ -7159,7 +7135,7 @@
                 <a:solidFill>
                   <a:srgbClr val="0A4275"/>
                 </a:solidFill>
-                <a:latin typeface="Microsoft YaHei"/>
+                <a:latin typeface="微软雅黑" panose="020B0503020204020204" charset="-122"/>
               </a:defRPr>
             </a:pPr>
             <a:r>
@@ -7273,7 +7249,7 @@
           <a:noFill/>
         </p:spPr>
         <p:txBody>
-          <a:bodyPr wrap="square" lIns="101600" rIns="101600" tIns="50800" bIns="50800">
+          <a:bodyPr wrap="square" lIns="101600" tIns="50800" rIns="101600" bIns="50800">
             <a:spAutoFit/>
           </a:bodyPr>
           <a:lstStyle/>
@@ -7283,7 +7259,7 @@
                 <a:solidFill>
                   <a:srgbClr val="DC3545"/>
                 </a:solidFill>
-                <a:latin typeface="Microsoft YaHei"/>
+                <a:latin typeface="微软雅黑" panose="020B0503020204020204" charset="-122"/>
               </a:defRPr>
             </a:pPr>
             <a:r>
@@ -7309,7 +7285,7 @@
           <a:noFill/>
         </p:spPr>
         <p:txBody>
-          <a:bodyPr wrap="square" lIns="101600" rIns="101600" tIns="50800" bIns="50800">
+          <a:bodyPr wrap="square" lIns="101600" tIns="50800" rIns="101600" bIns="50800">
             <a:spAutoFit/>
           </a:bodyPr>
           <a:lstStyle/>
@@ -7319,7 +7295,7 @@
                 <a:solidFill>
                   <a:srgbClr val="333333"/>
                 </a:solidFill>
-                <a:latin typeface="Microsoft YaHei"/>
+                <a:latin typeface="微软雅黑" panose="020B0503020204020204" charset="-122"/>
               </a:defRPr>
             </a:pPr>
             <a:r>
@@ -7433,7 +7409,7 @@
           <a:noFill/>
         </p:spPr>
         <p:txBody>
-          <a:bodyPr wrap="square" lIns="101600" rIns="101600" tIns="50800" bIns="50800">
+          <a:bodyPr wrap="square" lIns="101600" tIns="50800" rIns="101600" bIns="50800">
             <a:spAutoFit/>
           </a:bodyPr>
           <a:lstStyle/>
@@ -7443,7 +7419,7 @@
                 <a:solidFill>
                   <a:srgbClr val="EA580C"/>
                 </a:solidFill>
-                <a:latin typeface="Microsoft YaHei"/>
+                <a:latin typeface="微软雅黑" panose="020B0503020204020204" charset="-122"/>
               </a:defRPr>
             </a:pPr>
             <a:r>
@@ -7469,7 +7445,7 @@
           <a:noFill/>
         </p:spPr>
         <p:txBody>
-          <a:bodyPr wrap="square" lIns="101600" rIns="101600" tIns="50800" bIns="50800">
+          <a:bodyPr wrap="square" lIns="101600" tIns="50800" rIns="101600" bIns="50800">
             <a:spAutoFit/>
           </a:bodyPr>
           <a:lstStyle/>
@@ -7479,7 +7455,7 @@
                 <a:solidFill>
                   <a:srgbClr val="333333"/>
                 </a:solidFill>
-                <a:latin typeface="Microsoft YaHei"/>
+                <a:latin typeface="微软雅黑" panose="020B0503020204020204" charset="-122"/>
               </a:defRPr>
             </a:pPr>
             <a:r>
@@ -7593,7 +7569,7 @@
           <a:noFill/>
         </p:spPr>
         <p:txBody>
-          <a:bodyPr wrap="square" lIns="101600" rIns="101600" tIns="50800" bIns="50800">
+          <a:bodyPr wrap="square" lIns="101600" tIns="50800" rIns="101600" bIns="50800">
             <a:spAutoFit/>
           </a:bodyPr>
           <a:lstStyle/>
@@ -7603,7 +7579,7 @@
                 <a:solidFill>
                   <a:srgbClr val="0A4275"/>
                 </a:solidFill>
-                <a:latin typeface="Microsoft YaHei"/>
+                <a:latin typeface="微软雅黑" panose="020B0503020204020204" charset="-122"/>
               </a:defRPr>
             </a:pPr>
             <a:r>
@@ -7629,7 +7605,7 @@
           <a:noFill/>
         </p:spPr>
         <p:txBody>
-          <a:bodyPr wrap="square" lIns="101600" rIns="101600" tIns="50800" bIns="50800">
+          <a:bodyPr wrap="square" lIns="101600" tIns="50800" rIns="101600" bIns="50800">
             <a:spAutoFit/>
           </a:bodyPr>
           <a:lstStyle/>
@@ -7639,7 +7615,7 @@
                 <a:solidFill>
                   <a:srgbClr val="333333"/>
                 </a:solidFill>
-                <a:latin typeface="Microsoft YaHei"/>
+                <a:latin typeface="微软雅黑" panose="020B0503020204020204" charset="-122"/>
               </a:defRPr>
             </a:pPr>
             <a:r>
@@ -7657,7 +7633,7 @@
 </file>
 
 <file path=ppt/slides/slide8.xml><?xml version="1.0" encoding="utf-8"?>
-<p:sld xmlns:a="http://schemas.openxmlformats.org/drawingml/2006/main" xmlns:p="http://schemas.openxmlformats.org/presentationml/2006/main" xmlns:r="http://schemas.openxmlformats.org/officeDocument/2006/relationships">
+<p:sld xmlns:a="http://schemas.openxmlformats.org/drawingml/2006/main" xmlns:r="http://schemas.openxmlformats.org/officeDocument/2006/relationships" xmlns:p="http://schemas.openxmlformats.org/presentationml/2006/main">
   <p:cSld>
     <p:bg>
       <p:bgPr>
@@ -7777,7 +7753,7 @@
           <a:noFill/>
         </p:spPr>
         <p:txBody>
-          <a:bodyPr wrap="square" lIns="101600" rIns="101600" tIns="50800" bIns="50800">
+          <a:bodyPr wrap="square" lIns="101600" tIns="50800" rIns="101600" bIns="50800">
             <a:spAutoFit/>
           </a:bodyPr>
           <a:lstStyle/>
@@ -7787,7 +7763,7 @@
                 <a:solidFill>
                   <a:srgbClr val="0A4275"/>
                 </a:solidFill>
-                <a:latin typeface="Microsoft YaHei"/>
+                <a:latin typeface="微软雅黑" panose="020B0503020204020204" charset="-122"/>
               </a:defRPr>
             </a:pPr>
             <a:r>
@@ -7901,7 +7877,7 @@
           <a:noFill/>
         </p:spPr>
         <p:txBody>
-          <a:bodyPr wrap="square" lIns="101600" rIns="101600" tIns="50800" bIns="50800">
+          <a:bodyPr wrap="square" lIns="101600" tIns="50800" rIns="101600" bIns="50800">
             <a:spAutoFit/>
           </a:bodyPr>
           <a:lstStyle/>
@@ -7911,7 +7887,7 @@
                 <a:solidFill>
                   <a:srgbClr val="0A4275"/>
                 </a:solidFill>
-                <a:latin typeface="Microsoft YaHei"/>
+                <a:latin typeface="微软雅黑" panose="020B0503020204020204" charset="-122"/>
               </a:defRPr>
             </a:pPr>
             <a:r>
@@ -7937,7 +7913,7 @@
           <a:noFill/>
         </p:spPr>
         <p:txBody>
-          <a:bodyPr wrap="square" lIns="101600" rIns="101600" tIns="50800" bIns="50800">
+          <a:bodyPr wrap="square" lIns="101600" tIns="50800" rIns="101600" bIns="50800">
             <a:spAutoFit/>
           </a:bodyPr>
           <a:lstStyle/>
@@ -7947,7 +7923,7 @@
                 <a:solidFill>
                   <a:srgbClr val="333333"/>
                 </a:solidFill>
-                <a:latin typeface="Microsoft YaHei"/>
+                <a:latin typeface="微软雅黑" panose="020B0503020204020204" charset="-122"/>
               </a:defRPr>
             </a:pPr>
             <a:r>
@@ -8061,7 +8037,7 @@
           <a:noFill/>
         </p:spPr>
         <p:txBody>
-          <a:bodyPr wrap="square" lIns="101600" rIns="101600" tIns="50800" bIns="50800">
+          <a:bodyPr wrap="square" lIns="101600" tIns="50800" rIns="101600" bIns="50800">
             <a:spAutoFit/>
           </a:bodyPr>
           <a:lstStyle/>
@@ -8071,7 +8047,7 @@
                 <a:solidFill>
                   <a:srgbClr val="0A4275"/>
                 </a:solidFill>
-                <a:latin typeface="Microsoft YaHei"/>
+                <a:latin typeface="微软雅黑" panose="020B0503020204020204" charset="-122"/>
               </a:defRPr>
             </a:pPr>
             <a:r>
@@ -8097,7 +8073,7 @@
           <a:noFill/>
         </p:spPr>
         <p:txBody>
-          <a:bodyPr wrap="square" lIns="101600" rIns="101600" tIns="50800" bIns="50800">
+          <a:bodyPr wrap="square" lIns="101600" tIns="50800" rIns="101600" bIns="50800">
             <a:spAutoFit/>
           </a:bodyPr>
           <a:lstStyle/>
@@ -8107,7 +8083,7 @@
                 <a:solidFill>
                   <a:srgbClr val="333333"/>
                 </a:solidFill>
-                <a:latin typeface="Microsoft YaHei"/>
+                <a:latin typeface="微软雅黑" panose="020B0503020204020204" charset="-122"/>
               </a:defRPr>
             </a:pPr>
             <a:r>
@@ -8221,7 +8197,7 @@
           <a:noFill/>
         </p:spPr>
         <p:txBody>
-          <a:bodyPr wrap="square" lIns="101600" rIns="101600" tIns="50800" bIns="50800">
+          <a:bodyPr wrap="square" lIns="101600" tIns="50800" rIns="101600" bIns="50800">
             <a:spAutoFit/>
           </a:bodyPr>
           <a:lstStyle/>
@@ -8231,7 +8207,7 @@
                 <a:solidFill>
                   <a:srgbClr val="0A4275"/>
                 </a:solidFill>
-                <a:latin typeface="Microsoft YaHei"/>
+                <a:latin typeface="微软雅黑" panose="020B0503020204020204" charset="-122"/>
               </a:defRPr>
             </a:pPr>
             <a:r>
@@ -8257,7 +8233,7 @@
           <a:noFill/>
         </p:spPr>
         <p:txBody>
-          <a:bodyPr wrap="square" lIns="101600" rIns="101600" tIns="50800" bIns="50800">
+          <a:bodyPr wrap="square" lIns="101600" tIns="50800" rIns="101600" bIns="50800">
             <a:spAutoFit/>
           </a:bodyPr>
           <a:lstStyle/>
@@ -8267,7 +8243,7 @@
                 <a:solidFill>
                   <a:srgbClr val="333333"/>
                 </a:solidFill>
-                <a:latin typeface="Microsoft YaHei"/>
+                <a:latin typeface="微软雅黑" panose="020B0503020204020204" charset="-122"/>
               </a:defRPr>
             </a:pPr>
             <a:r>
@@ -8381,7 +8357,7 @@
           <a:noFill/>
         </p:spPr>
         <p:txBody>
-          <a:bodyPr wrap="square" lIns="101600" rIns="101600" tIns="50800" bIns="50800">
+          <a:bodyPr wrap="square" lIns="101600" tIns="50800" rIns="101600" bIns="50800">
             <a:spAutoFit/>
           </a:bodyPr>
           <a:lstStyle/>
@@ -8391,7 +8367,7 @@
                 <a:solidFill>
                   <a:srgbClr val="0A4275"/>
                 </a:solidFill>
-                <a:latin typeface="Microsoft YaHei"/>
+                <a:latin typeface="微软雅黑" panose="020B0503020204020204" charset="-122"/>
               </a:defRPr>
             </a:pPr>
             <a:r>
@@ -8417,7 +8393,7 @@
           <a:noFill/>
         </p:spPr>
         <p:txBody>
-          <a:bodyPr wrap="square" lIns="101600" rIns="101600" tIns="50800" bIns="50800">
+          <a:bodyPr wrap="square" lIns="101600" tIns="50800" rIns="101600" bIns="50800">
             <a:spAutoFit/>
           </a:bodyPr>
           <a:lstStyle/>
@@ -8427,7 +8403,7 @@
                 <a:solidFill>
                   <a:srgbClr val="333333"/>
                 </a:solidFill>
-                <a:latin typeface="Microsoft YaHei"/>
+                <a:latin typeface="微软雅黑" panose="020B0503020204020204" charset="-122"/>
               </a:defRPr>
             </a:pPr>
             <a:r>
@@ -8453,7 +8429,7 @@
           <a:noFill/>
         </p:spPr>
         <p:txBody>
-          <a:bodyPr wrap="square" lIns="101600" rIns="101600" tIns="50800" bIns="50800">
+          <a:bodyPr wrap="square" lIns="101600" tIns="50800" rIns="101600" bIns="50800">
             <a:spAutoFit/>
           </a:bodyPr>
           <a:lstStyle/>
@@ -8463,7 +8439,7 @@
                 <a:solidFill>
                   <a:srgbClr val="666666"/>
                 </a:solidFill>
-                <a:latin typeface="Microsoft YaHei"/>
+                <a:latin typeface="微软雅黑" panose="020B0503020204020204" charset="-122"/>
               </a:defRPr>
             </a:pPr>
             <a:r>
@@ -8478,6 +8454,12 @@
     <a:masterClrMapping/>
   </p:clrMapOvr>
 </p:sld>
+</file>
+
+<file path=ppt/tags/tag1.xml><?xml version="1.0" encoding="utf-8"?>
+<p:tagLst xmlns:p="http://schemas.openxmlformats.org/presentationml/2006/main">
+  <p:tag name="commondata" val="eyJoZGlkIjoiNzBiN2QxNGQ4NjIwZWE5Mjc3ZDY1N2NlMGYwOTU3MDUifQ=="/>
+</p:tagLst>
 </file>
 
 <file path=ppt/theme/theme1.xml><?xml version="1.0" encoding="utf-8"?>
@@ -8796,6 +8778,10 @@
       </a:style>
     </a:lnDef>
   </a:objectDefaults>
-  <a:extraClrSchemeLst/>
+  <a:extLst>
+    <a:ext uri="{05A4C25C-085E-4340-85A3-A5531E510DB2}">
+      <thm15:themeFamily xmlns:thm15="http://schemas.microsoft.com/office/thememl/2012/main" name="Office Theme" id="{62F939B6-93AF-4DB8-9C6B-D6C7DFDC589F}" vid="{4A3C46E8-61CC-4603-A589-7422A47A8E4A}"/>
+    </a:ext>
+  </a:extLst>
 </a:theme>
 </file>
--- a/mss_ai_ppt_sample_assets/backend/data/templates/mss_executive_v2.pptx
+++ b/mss_ai_ppt_sample_assets/backend/data/templates/mss_executive_v2.pptx
@@ -117,7 +117,7 @@
   <p:extLst>
     <p:ext uri="{EFAFB233-063F-42B5-8137-9DF3F51BA10A}">
       <p15:sldGuideLst xmlns:p15="http://schemas.microsoft.com/office/powerpoint/2012/main">
-        <p15:guide id="1" orient="horz" pos="2188" userDrawn="1">
+        <p15:guide id="1" orient="horz" pos="2160" userDrawn="1">
           <p15:clr>
             <a:srgbClr val="A4A3A4"/>
           </p15:clr>
@@ -4177,7 +4177,7 @@
         <p:spPr>
           <a:xfrm>
             <a:off x="731520" y="1325880"/>
-            <a:ext cx="4983480" cy="1645920"/>
+            <a:ext cx="4983480" cy="285750"/>
           </a:xfrm>
           <a:prstGeom prst="rect">
             <a:avLst/>
@@ -4198,9 +4198,6 @@
                 <a:latin typeface="微软雅黑" panose="020B0503020204020204" charset="-122"/>
               </a:defRPr>
             </a:pPr>
-            <a:r>
-              <a:t>{{TREND_ANALYSIS}}</a:t>
-            </a:r>
           </a:p>
         </p:txBody>
       </p:sp>
